--- a/report/REPORT.pptx
+++ b/report/REPORT.pptx
@@ -7,6 +7,8 @@
   <p:sldIdLst>
     <p:sldId id="256" r:id="rId2"/>
     <p:sldId id="257" r:id="rId3"/>
+    <p:sldId id="269" r:id="rId20"/>
+    <p:sldId id="270" r:id="rId21"/>
     <p:sldId id="258" r:id="rId4"/>
     <p:sldId id="259" r:id="rId5"/>
     <p:sldId id="260" r:id="rId6"/>
@@ -5946,6 +5948,1805 @@
 </p:sld>
 </file>
 
+<file path=ppt/slides/slide14.xml><?xml version="1.0" encoding="utf-8"?>
+<p:sld xmlns:a="http://schemas.openxmlformats.org/drawingml/2006/main" xmlns:p="http://schemas.openxmlformats.org/presentationml/2006/main" xmlns:r="http://schemas.openxmlformats.org/officeDocument/2006/relationships">
+  <p:cSld>
+    <p:spTree>
+      <p:nvGrpSpPr>
+        <p:cNvPr id="1" name=""/>
+        <p:cNvGrpSpPr/>
+        <p:nvPr/>
+      </p:nvGrpSpPr>
+      <p:grpSpPr/>
+      <p:sp>
+        <p:nvSpPr>
+          <p:cNvPr id="2" name="Text 0"/>
+          <p:cNvSpPr/>
+          <p:nvPr>
+            <p:ph idx="100" type="title" hasCustomPrompt="1"/>
+          </p:nvPr>
+        </p:nvSpPr>
+        <p:spPr>
+          <a:xfrm>
+            <a:off x="640080" y="411480"/>
+            <a:ext cx="10908792" cy="822960"/>
+          </a:xfrm>
+          <a:prstGeom prst="rect">
+            <a:avLst/>
+          </a:prstGeom>
+          <a:noFill/>
+          <a:ln/>
+        </p:spPr>
+        <p:txBody>
+          <a:bodyPr wrap="square" lIns="0" tIns="0" rIns="0" bIns="0" rtlCol="0" anchor="ctr"/>
+          <a:lstStyle/>
+          <a:p>
+            <a:pPr algn="l" indent="0" marL="0">
+              <a:buNone/>
+            </a:pPr>
+            <a:r>
+              <a:rPr lang="en-US" sz="2800" b="1" dirty="0">
+                <a:solidFill>
+                  <a:schemeClr val="tx2"/>
+                </a:solidFill>
+              </a:rPr>
+              <a:t>선택의 기점: 갈림길마다 무엇을 골랐나</a:t>
+            </a:r>
+            <a:endParaRPr lang="en-US" sz="2800" dirty="0"/>
+          </a:p>
+        </p:txBody>
+      </p:sp>
+      <p:sp>
+        <p:nvSpPr>
+          <p:cNvPr id="3" name="Slide Number Placeholder 0"/>
+          <p:cNvSpPr>
+            <a:spLocks noGrp="1"/>
+          </p:cNvSpPr>
+          <p:nvPr>
+            <p:ph type="sldNum" sz="quarter" idx="4294967295"/>
+          </p:nvPr>
+        </p:nvSpPr>
+        <p:spPr>
+          <a:xfrm>
+            <a:off x="11274552" y="6400800"/>
+            <a:ext cx="457200" cy="274320"/>
+          </a:xfrm>
+          <a:prstGeom prst="rect">
+            <a:avLst/>
+          </a:prstGeom>
+          <a:extLst>
+            <a:ext uri="{C572A759-6A51-4108-AA02-DFA0A04FC94B}">
+              <ma14:wrappingTextBoxFlag xmlns:ma14="http://schemas.microsoft.com/office/mac/drawingml/2011/main" val="0"/>
+            </a:ext>
+          </a:extLst>
+        </p:spPr>
+        <p:txBody>
+          <a:bodyPr/>
+          <a:lstStyle>
+            <a:lvl1pPr>
+              <a:defRPr sz="1000">
+                <a:solidFill>
+                  <a:schemeClr val="accent4"/>
+                </a:solidFill>
+              </a:defRPr>
+            </a:lvl1pPr>
+          </a:lstStyle>
+          <a:p>
+            <a:pPr algn="r"/>
+            <a:fld id="{F7021451-1387-4CA6-816F-3879F97B5CBC}" type="slidenum">
+              <a:rPr b="0" lang="en-US"/>
+              <a:t>9</a:t>
+            </a:fld>
+            <a:endParaRPr lang="en-US"/>
+          </a:p>
+        </p:txBody>
+      </p:sp>
+      <p:sp>
+        <p:nvSpPr>
+          <p:cNvPr id="4" name="Choice row 1"/>
+          <p:cNvSpPr/>
+          <p:nvPr/>
+        </p:nvSpPr>
+        <p:spPr>
+          <a:xfrm>
+            <a:off x="640080" y="1417320"/>
+            <a:ext cx="10908792" cy="749808"/>
+          </a:xfrm>
+          <a:prstGeom prst="roundRect">
+            <a:avLst>
+              <a:gd name="adj" fmla="val 3243"/>
+            </a:avLst>
+          </a:prstGeom>
+          <a:solidFill>
+            <a:schemeClr val="bg2"/>
+          </a:solidFill>
+          <a:ln w="12700">
+            <a:solidFill>
+              <a:schemeClr val="bg2"/>
+            </a:solidFill>
+            <a:prstDash val="solid"/>
+          </a:ln>
+        </p:spPr>
+      </p:sp>
+      <p:sp>
+        <p:nvSpPr>
+          <p:cNvPr id="5" name="Choice stage 1"/>
+          <p:cNvSpPr txBox="1"/>
+          <p:nvPr/>
+        </p:nvSpPr>
+        <p:spPr>
+          <a:xfrm>
+            <a:off x="868680" y="1417320"/>
+            <a:ext cx="1280160" cy="749808"/>
+          </a:xfrm>
+          <a:prstGeom prst="rect">
+            <a:avLst/>
+          </a:prstGeom>
+          <a:noFill/>
+          <a:ln/>
+        </p:spPr>
+        <p:txBody>
+          <a:bodyPr wrap="square" lIns="0" tIns="0" rIns="0" bIns="0" rtlCol="0" anchor="ctr"/>
+          <a:lstStyle/>
+          <a:p>
+            <a:pPr algn="l" indent="0" marL="0">
+              <a:buNone/>
+            </a:pPr>
+            <a:r>
+              <a:rPr lang="en-US" sz="1600" dirty="0" b="1">
+                <a:solidFill>
+                  <a:schemeClr val="accent1"/>
+                </a:solidFill>
+              </a:rPr>
+              <a:t>문서 읽기</a:t>
+            </a:r>
+            <a:endParaRPr lang="en-US" sz="1600" dirty="0"/>
+          </a:p>
+        </p:txBody>
+      </p:sp>
+      <p:sp>
+        <p:nvSpPr>
+          <p:cNvPr id="6" name="Choice pick 1"/>
+          <p:cNvSpPr txBox="1"/>
+          <p:nvPr/>
+        </p:nvSpPr>
+        <p:spPr>
+          <a:xfrm>
+            <a:off x="2240280" y="1417320"/>
+            <a:ext cx="3200400" cy="749808"/>
+          </a:xfrm>
+          <a:prstGeom prst="rect">
+            <a:avLst/>
+          </a:prstGeom>
+          <a:noFill/>
+          <a:ln/>
+        </p:spPr>
+        <p:txBody>
+          <a:bodyPr wrap="square" lIns="0" tIns="0" rIns="0" bIns="0" rtlCol="0" anchor="ctr"/>
+          <a:lstStyle/>
+          <a:p>
+            <a:pPr algn="l" indent="0" marL="0">
+              <a:buNone/>
+            </a:pPr>
+            <a:r>
+              <a:rPr lang="en-US" sz="1400" dirty="0" b="1">
+                <a:solidFill>
+                  <a:schemeClr val="tx2"/>
+                </a:solidFill>
+              </a:rPr>
+              <a:t>형식별로 분담하고 XML을 정답지로 채점</a:t>
+            </a:r>
+            <a:endParaRPr lang="en-US" sz="1400" dirty="0"/>
+          </a:p>
+        </p:txBody>
+      </p:sp>
+      <p:sp>
+        <p:nvSpPr>
+          <p:cNvPr id="7" name="Choice why 1"/>
+          <p:cNvSpPr txBox="1"/>
+          <p:nvPr/>
+        </p:nvSpPr>
+        <p:spPr>
+          <a:xfrm>
+            <a:off x="5669280" y="1417320"/>
+            <a:ext cx="5650992" cy="749808"/>
+          </a:xfrm>
+          <a:prstGeom prst="rect">
+            <a:avLst/>
+          </a:prstGeom>
+          <a:noFill/>
+          <a:ln/>
+        </p:spPr>
+        <p:txBody>
+          <a:bodyPr wrap="square" lIns="0" tIns="0" rIns="0" bIns="0" rtlCol="0" anchor="ctr"/>
+          <a:lstStyle/>
+          <a:p>
+            <a:pPr algn="l" indent="0" marL="0">
+              <a:buNone/>
+            </a:pPr>
+            <a:r>
+              <a:rPr lang="en-US" sz="1400" dirty="0" b="1">
+                <a:solidFill>
+                  <a:schemeClr val="accent1"/>
+                </a:solidFill>
+              </a:rPr>
+              <a:t>내가 한 것  </a:t>
+            </a:r>
+            <a:r>
+              <a:rPr lang="en-US" sz="1400" dirty="0">
+                <a:solidFill>
+                  <a:schemeClr val="tx1"/>
+                </a:solidFill>
+              </a:rPr>
+              <a:t>HWPX 로더·구조 파서·채점 도구 구현. XML 대비 청크 62/62 일치</a:t>
+            </a:r>
+            <a:endParaRPr lang="en-US" sz="1400" dirty="0"/>
+          </a:p>
+        </p:txBody>
+      </p:sp>
+      <p:sp>
+        <p:nvSpPr>
+          <p:cNvPr id="8" name="Choice row 2"/>
+          <p:cNvSpPr/>
+          <p:nvPr/>
+        </p:nvSpPr>
+        <p:spPr>
+          <a:xfrm>
+            <a:off x="640080" y="2258568"/>
+            <a:ext cx="10908792" cy="749808"/>
+          </a:xfrm>
+          <a:prstGeom prst="roundRect">
+            <a:avLst>
+              <a:gd name="adj" fmla="val 3243"/>
+            </a:avLst>
+          </a:prstGeom>
+          <a:solidFill>
+            <a:schemeClr val="bg2"/>
+          </a:solidFill>
+          <a:ln w="12700">
+            <a:solidFill>
+              <a:schemeClr val="bg2"/>
+            </a:solidFill>
+            <a:prstDash val="solid"/>
+          </a:ln>
+        </p:spPr>
+      </p:sp>
+      <p:sp>
+        <p:nvSpPr>
+          <p:cNvPr id="9" name="Choice stage 2"/>
+          <p:cNvSpPr txBox="1"/>
+          <p:nvPr/>
+        </p:nvSpPr>
+        <p:spPr>
+          <a:xfrm>
+            <a:off x="868680" y="2258568"/>
+            <a:ext cx="1280160" cy="749808"/>
+          </a:xfrm>
+          <a:prstGeom prst="rect">
+            <a:avLst/>
+          </a:prstGeom>
+          <a:noFill/>
+          <a:ln/>
+        </p:spPr>
+        <p:txBody>
+          <a:bodyPr wrap="square" lIns="0" tIns="0" rIns="0" bIns="0" rtlCol="0" anchor="ctr"/>
+          <a:lstStyle/>
+          <a:p>
+            <a:pPr algn="l" indent="0" marL="0">
+              <a:buNone/>
+            </a:pPr>
+            <a:r>
+              <a:rPr lang="en-US" sz="1600" dirty="0" b="1">
+                <a:solidFill>
+                  <a:schemeClr val="accent1"/>
+                </a:solidFill>
+              </a:rPr>
+              <a:t>청킹</a:t>
+            </a:r>
+            <a:endParaRPr lang="en-US" sz="1600" dirty="0"/>
+          </a:p>
+        </p:txBody>
+      </p:sp>
+      <p:sp>
+        <p:nvSpPr>
+          <p:cNvPr id="10" name="Choice pick 2"/>
+          <p:cNvSpPr txBox="1"/>
+          <p:nvPr/>
+        </p:nvSpPr>
+        <p:spPr>
+          <a:xfrm>
+            <a:off x="2240280" y="2258568"/>
+            <a:ext cx="3200400" cy="749808"/>
+          </a:xfrm>
+          <a:prstGeom prst="rect">
+            <a:avLst/>
+          </a:prstGeom>
+          <a:noFill/>
+          <a:ln/>
+        </p:spPr>
+        <p:txBody>
+          <a:bodyPr wrap="square" lIns="0" tIns="0" rIns="0" bIns="0" rtlCol="0" anchor="ctr"/>
+          <a:lstStyle/>
+          <a:p>
+            <a:pPr algn="l" indent="0" marL="0">
+              <a:buNone/>
+            </a:pPr>
+            <a:r>
+              <a:rPr lang="en-US" sz="1400" dirty="0" b="1">
+                <a:solidFill>
+                  <a:schemeClr val="tx2"/>
+                </a:solidFill>
+              </a:rPr>
+              <a:t>조 1개 = 청크 1개, 제2조만 호 단위</a:t>
+            </a:r>
+            <a:endParaRPr lang="en-US" sz="1400" dirty="0"/>
+          </a:p>
+        </p:txBody>
+      </p:sp>
+      <p:sp>
+        <p:nvSpPr>
+          <p:cNvPr id="11" name="Choice why 2"/>
+          <p:cNvSpPr txBox="1"/>
+          <p:nvPr/>
+        </p:nvSpPr>
+        <p:spPr>
+          <a:xfrm>
+            <a:off x="5669280" y="2258568"/>
+            <a:ext cx="5650992" cy="749808"/>
+          </a:xfrm>
+          <a:prstGeom prst="rect">
+            <a:avLst/>
+          </a:prstGeom>
+          <a:noFill/>
+          <a:ln/>
+        </p:spPr>
+        <p:txBody>
+          <a:bodyPr wrap="square" lIns="0" tIns="0" rIns="0" bIns="0" rtlCol="0" anchor="ctr"/>
+          <a:lstStyle/>
+          <a:p>
+            <a:pPr algn="l" indent="0" marL="0">
+              <a:buNone/>
+            </a:pPr>
+            <a:r>
+              <a:rPr lang="en-US" sz="1400" dirty="0" b="1">
+                <a:solidFill>
+                  <a:schemeClr val="accent1"/>
+                </a:solidFill>
+              </a:rPr>
+              <a:t>왜  </a:t>
+            </a:r>
+            <a:r>
+              <a:rPr lang="en-US" sz="1400" dirty="0">
+                <a:solidFill>
+                  <a:schemeClr val="tx1"/>
+                </a:solidFill>
+              </a:rPr>
+              <a:t>출처("제○조")와 1:1로 맞고, 정의 12개가 섞이는 걸 막으려고</a:t>
+            </a:r>
+            <a:endParaRPr lang="en-US" sz="1400" dirty="0"/>
+          </a:p>
+        </p:txBody>
+      </p:sp>
+      <p:sp>
+        <p:nvSpPr>
+          <p:cNvPr id="12" name="Choice row 3"/>
+          <p:cNvSpPr/>
+          <p:nvPr/>
+        </p:nvSpPr>
+        <p:spPr>
+          <a:xfrm>
+            <a:off x="640080" y="3099816"/>
+            <a:ext cx="10908792" cy="749808"/>
+          </a:xfrm>
+          <a:prstGeom prst="roundRect">
+            <a:avLst>
+              <a:gd name="adj" fmla="val 3243"/>
+            </a:avLst>
+          </a:prstGeom>
+          <a:solidFill>
+            <a:schemeClr val="bg2"/>
+          </a:solidFill>
+          <a:ln w="12700">
+            <a:solidFill>
+              <a:schemeClr val="bg2"/>
+            </a:solidFill>
+            <a:prstDash val="solid"/>
+          </a:ln>
+        </p:spPr>
+      </p:sp>
+      <p:sp>
+        <p:nvSpPr>
+          <p:cNvPr id="13" name="Choice stage 3"/>
+          <p:cNvSpPr txBox="1"/>
+          <p:nvPr/>
+        </p:nvSpPr>
+        <p:spPr>
+          <a:xfrm>
+            <a:off x="868680" y="3099816"/>
+            <a:ext cx="1280160" cy="749808"/>
+          </a:xfrm>
+          <a:prstGeom prst="rect">
+            <a:avLst/>
+          </a:prstGeom>
+          <a:noFill/>
+          <a:ln/>
+        </p:spPr>
+        <p:txBody>
+          <a:bodyPr wrap="square" lIns="0" tIns="0" rIns="0" bIns="0" rtlCol="0" anchor="ctr"/>
+          <a:lstStyle/>
+          <a:p>
+            <a:pPr algn="l" indent="0" marL="0">
+              <a:buNone/>
+            </a:pPr>
+            <a:r>
+              <a:rPr lang="en-US" sz="1600" dirty="0" b="1">
+                <a:solidFill>
+                  <a:schemeClr val="accent1"/>
+                </a:solidFill>
+              </a:rPr>
+              <a:t>검색</a:t>
+            </a:r>
+            <a:endParaRPr lang="en-US" sz="1600" dirty="0"/>
+          </a:p>
+        </p:txBody>
+      </p:sp>
+      <p:sp>
+        <p:nvSpPr>
+          <p:cNvPr id="14" name="Choice pick 3"/>
+          <p:cNvSpPr txBox="1"/>
+          <p:nvPr/>
+        </p:nvSpPr>
+        <p:spPr>
+          <a:xfrm>
+            <a:off x="2240280" y="3099816"/>
+            <a:ext cx="3200400" cy="749808"/>
+          </a:xfrm>
+          <a:prstGeom prst="rect">
+            <a:avLst/>
+          </a:prstGeom>
+          <a:noFill/>
+          <a:ln/>
+        </p:spPr>
+        <p:txBody>
+          <a:bodyPr wrap="square" lIns="0" tIns="0" rIns="0" bIns="0" rtlCol="0" anchor="ctr"/>
+          <a:lstStyle/>
+          <a:p>
+            <a:pPr algn="l" indent="0" marL="0">
+              <a:buNone/>
+            </a:pPr>
+            <a:r>
+              <a:rPr lang="en-US" sz="1400" dirty="0" b="1">
+                <a:solidFill>
+                  <a:schemeClr val="tx2"/>
+                </a:solidFill>
+              </a:rPr>
+              <a:t>Hybrid 대신 Multi Query + Reranker</a:t>
+            </a:r>
+            <a:endParaRPr lang="en-US" sz="1400" dirty="0"/>
+          </a:p>
+        </p:txBody>
+      </p:sp>
+      <p:sp>
+        <p:nvSpPr>
+          <p:cNvPr id="15" name="Choice why 3"/>
+          <p:cNvSpPr txBox="1"/>
+          <p:nvPr/>
+        </p:nvSpPr>
+        <p:spPr>
+          <a:xfrm>
+            <a:off x="5669280" y="3099816"/>
+            <a:ext cx="5650992" cy="749808"/>
+          </a:xfrm>
+          <a:prstGeom prst="rect">
+            <a:avLst/>
+          </a:prstGeom>
+          <a:noFill/>
+          <a:ln/>
+        </p:spPr>
+        <p:txBody>
+          <a:bodyPr wrap="square" lIns="0" tIns="0" rIns="0" bIns="0" rtlCol="0" anchor="ctr"/>
+          <a:lstStyle/>
+          <a:p>
+            <a:pPr algn="l" indent="0" marL="0">
+              <a:buNone/>
+            </a:pPr>
+            <a:r>
+              <a:rPr lang="en-US" sz="1400" dirty="0" b="1">
+                <a:solidFill>
+                  <a:schemeClr val="accent1"/>
+                </a:solidFill>
+              </a:rPr>
+              <a:t>내가 선택  </a:t>
+            </a:r>
+            <a:r>
+              <a:rPr lang="en-US" sz="1400" dirty="0">
+                <a:solidFill>
+                  <a:schemeClr val="tx1"/>
+                </a:solidFill>
+              </a:rPr>
+              <a:t>질문을 바꿔 쓰면, 거기에 재정렬을 붙이면 좋아질 것이라는 가설</a:t>
+            </a:r>
+            <a:endParaRPr lang="en-US" sz="1400" dirty="0"/>
+          </a:p>
+        </p:txBody>
+      </p:sp>
+      <p:sp>
+        <p:nvSpPr>
+          <p:cNvPr id="16" name="Choice row 4"/>
+          <p:cNvSpPr/>
+          <p:nvPr/>
+        </p:nvSpPr>
+        <p:spPr>
+          <a:xfrm>
+            <a:off x="640080" y="3941064"/>
+            <a:ext cx="10908792" cy="749808"/>
+          </a:xfrm>
+          <a:prstGeom prst="roundRect">
+            <a:avLst>
+              <a:gd name="adj" fmla="val 3243"/>
+            </a:avLst>
+          </a:prstGeom>
+          <a:solidFill>
+            <a:schemeClr val="bg2"/>
+          </a:solidFill>
+          <a:ln w="12700">
+            <a:solidFill>
+              <a:schemeClr val="bg2"/>
+            </a:solidFill>
+            <a:prstDash val="solid"/>
+          </a:ln>
+        </p:spPr>
+      </p:sp>
+      <p:sp>
+        <p:nvSpPr>
+          <p:cNvPr id="17" name="Choice stage 4"/>
+          <p:cNvSpPr txBox="1"/>
+          <p:nvPr/>
+        </p:nvSpPr>
+        <p:spPr>
+          <a:xfrm>
+            <a:off x="868680" y="3941064"/>
+            <a:ext cx="1280160" cy="749808"/>
+          </a:xfrm>
+          <a:prstGeom prst="rect">
+            <a:avLst/>
+          </a:prstGeom>
+          <a:noFill/>
+          <a:ln/>
+        </p:spPr>
+        <p:txBody>
+          <a:bodyPr wrap="square" lIns="0" tIns="0" rIns="0" bIns="0" rtlCol="0" anchor="ctr"/>
+          <a:lstStyle/>
+          <a:p>
+            <a:pPr algn="l" indent="0" marL="0">
+              <a:buNone/>
+            </a:pPr>
+            <a:r>
+              <a:rPr lang="en-US" sz="1600" dirty="0" b="1">
+                <a:solidFill>
+                  <a:schemeClr val="accent1"/>
+                </a:solidFill>
+              </a:rPr>
+              <a:t>임베딩</a:t>
+            </a:r>
+            <a:endParaRPr lang="en-US" sz="1600" dirty="0"/>
+          </a:p>
+        </p:txBody>
+      </p:sp>
+      <p:sp>
+        <p:nvSpPr>
+          <p:cNvPr id="18" name="Choice pick 4"/>
+          <p:cNvSpPr txBox="1"/>
+          <p:nvPr/>
+        </p:nvSpPr>
+        <p:spPr>
+          <a:xfrm>
+            <a:off x="2240280" y="3941064"/>
+            <a:ext cx="3200400" cy="749808"/>
+          </a:xfrm>
+          <a:prstGeom prst="rect">
+            <a:avLst/>
+          </a:prstGeom>
+          <a:noFill/>
+          <a:ln/>
+        </p:spPr>
+        <p:txBody>
+          <a:bodyPr wrap="square" lIns="0" tIns="0" rIns="0" bIns="0" rtlCol="0" anchor="ctr"/>
+          <a:lstStyle/>
+          <a:p>
+            <a:pPr algn="l" indent="0" marL="0">
+              <a:buNone/>
+            </a:pPr>
+            <a:r>
+              <a:rPr lang="en-US" sz="1400" dirty="0" b="1">
+                <a:solidFill>
+                  <a:schemeClr val="tx2"/>
+                </a:solidFill>
+              </a:rPr>
+              <a:t>text-embedding-3-small로 고정</a:t>
+            </a:r>
+            <a:endParaRPr lang="en-US" sz="1400" dirty="0"/>
+          </a:p>
+        </p:txBody>
+      </p:sp>
+      <p:sp>
+        <p:nvSpPr>
+          <p:cNvPr id="19" name="Choice why 4"/>
+          <p:cNvSpPr txBox="1"/>
+          <p:nvPr/>
+        </p:nvSpPr>
+        <p:spPr>
+          <a:xfrm>
+            <a:off x="5669280" y="3941064"/>
+            <a:ext cx="5650992" cy="749808"/>
+          </a:xfrm>
+          <a:prstGeom prst="rect">
+            <a:avLst/>
+          </a:prstGeom>
+          <a:noFill/>
+          <a:ln/>
+        </p:spPr>
+        <p:txBody>
+          <a:bodyPr wrap="square" lIns="0" tIns="0" rIns="0" bIns="0" rtlCol="0" anchor="ctr"/>
+          <a:lstStyle/>
+          <a:p>
+            <a:pPr algn="l" indent="0" marL="0">
+              <a:buNone/>
+            </a:pPr>
+            <a:r>
+              <a:rPr lang="en-US" sz="1400" dirty="0" b="1">
+                <a:solidFill>
+                  <a:schemeClr val="accent1"/>
+                </a:solidFill>
+              </a:rPr>
+              <a:t>왜  </a:t>
+            </a:r>
+            <a:r>
+              <a:rPr lang="en-US" sz="1400" dirty="0">
+                <a:solidFill>
+                  <a:schemeClr val="tx1"/>
+                </a:solidFill>
+              </a:rPr>
+              <a:t>검색 방식만 바꿔야 성능 차이의 원인이 분명해진다</a:t>
+            </a:r>
+            <a:endParaRPr lang="en-US" sz="1400" dirty="0"/>
+          </a:p>
+        </p:txBody>
+      </p:sp>
+      <p:sp>
+        <p:nvSpPr>
+          <p:cNvPr id="20" name="Choice row 5"/>
+          <p:cNvSpPr/>
+          <p:nvPr/>
+        </p:nvSpPr>
+        <p:spPr>
+          <a:xfrm>
+            <a:off x="640080" y="4782312"/>
+            <a:ext cx="10908792" cy="749808"/>
+          </a:xfrm>
+          <a:prstGeom prst="roundRect">
+            <a:avLst>
+              <a:gd name="adj" fmla="val 3243"/>
+            </a:avLst>
+          </a:prstGeom>
+          <a:solidFill>
+            <a:schemeClr val="bg2"/>
+          </a:solidFill>
+          <a:ln w="12700">
+            <a:solidFill>
+              <a:schemeClr val="bg2"/>
+            </a:solidFill>
+            <a:prstDash val="solid"/>
+          </a:ln>
+        </p:spPr>
+      </p:sp>
+      <p:sp>
+        <p:nvSpPr>
+          <p:cNvPr id="21" name="Choice stage 5"/>
+          <p:cNvSpPr txBox="1"/>
+          <p:nvPr/>
+        </p:nvSpPr>
+        <p:spPr>
+          <a:xfrm>
+            <a:off x="868680" y="4782312"/>
+            <a:ext cx="1280160" cy="749808"/>
+          </a:xfrm>
+          <a:prstGeom prst="rect">
+            <a:avLst/>
+          </a:prstGeom>
+          <a:noFill/>
+          <a:ln/>
+        </p:spPr>
+        <p:txBody>
+          <a:bodyPr wrap="square" lIns="0" tIns="0" rIns="0" bIns="0" rtlCol="0" anchor="ctr"/>
+          <a:lstStyle/>
+          <a:p>
+            <a:pPr algn="l" indent="0" marL="0">
+              <a:buNone/>
+            </a:pPr>
+            <a:r>
+              <a:rPr lang="en-US" sz="1600" dirty="0" b="1">
+                <a:solidFill>
+                  <a:schemeClr val="accent1"/>
+                </a:solidFill>
+              </a:rPr>
+              <a:t>평가</a:t>
+            </a:r>
+            <a:endParaRPr lang="en-US" sz="1600" dirty="0"/>
+          </a:p>
+        </p:txBody>
+      </p:sp>
+      <p:sp>
+        <p:nvSpPr>
+          <p:cNvPr id="22" name="Choice pick 5"/>
+          <p:cNvSpPr txBox="1"/>
+          <p:nvPr/>
+        </p:nvSpPr>
+        <p:spPr>
+          <a:xfrm>
+            <a:off x="2240280" y="4782312"/>
+            <a:ext cx="3200400" cy="749808"/>
+          </a:xfrm>
+          <a:prstGeom prst="rect">
+            <a:avLst/>
+          </a:prstGeom>
+          <a:noFill/>
+          <a:ln/>
+        </p:spPr>
+        <p:txBody>
+          <a:bodyPr wrap="square" lIns="0" tIns="0" rIns="0" bIns="0" rtlCol="0" anchor="ctr"/>
+          <a:lstStyle/>
+          <a:p>
+            <a:pPr algn="l" indent="0" marL="0">
+              <a:buNone/>
+            </a:pPr>
+            <a:r>
+              <a:rPr lang="en-US" sz="1400" dirty="0" b="1">
+                <a:solidFill>
+                  <a:schemeClr val="tx2"/>
+                </a:solidFill>
+              </a:rPr>
+              <a:t>조문·청크 단위 + Hit·Recall 병행</a:t>
+            </a:r>
+            <a:endParaRPr lang="en-US" sz="1400" dirty="0"/>
+          </a:p>
+        </p:txBody>
+      </p:sp>
+      <p:sp>
+        <p:nvSpPr>
+          <p:cNvPr id="23" name="Choice why 5"/>
+          <p:cNvSpPr txBox="1"/>
+          <p:nvPr/>
+        </p:nvSpPr>
+        <p:spPr>
+          <a:xfrm>
+            <a:off x="5669280" y="4782312"/>
+            <a:ext cx="5650992" cy="749808"/>
+          </a:xfrm>
+          <a:prstGeom prst="rect">
+            <a:avLst/>
+          </a:prstGeom>
+          <a:noFill/>
+          <a:ln/>
+        </p:spPr>
+        <p:txBody>
+          <a:bodyPr wrap="square" lIns="0" tIns="0" rIns="0" bIns="0" rtlCol="0" anchor="ctr"/>
+          <a:lstStyle/>
+          <a:p>
+            <a:pPr algn="l" indent="0" marL="0">
+              <a:buNone/>
+            </a:pPr>
+            <a:r>
+              <a:rPr lang="en-US" sz="1400" dirty="0" b="1">
+                <a:solidFill>
+                  <a:schemeClr val="accent1"/>
+                </a:solidFill>
+              </a:rPr>
+              <a:t>내가 한 것  </a:t>
+            </a:r>
+            <a:r>
+              <a:rPr lang="en-US" sz="1400" dirty="0">
+                <a:solidFill>
+                  <a:schemeClr val="tx1"/>
+                </a:solidFill>
+              </a:rPr>
+              <a:t>골든셋 64문항 설계 (다음 슬라이드). 조문 단위만으론 실패가 가려졌다</a:t>
+            </a:r>
+            <a:endParaRPr lang="en-US" sz="1400" dirty="0"/>
+          </a:p>
+        </p:txBody>
+      </p:sp>
+      <p:sp>
+        <p:nvSpPr>
+          <p:cNvPr id="24" name="Choice result"/>
+          <p:cNvSpPr txBox="1"/>
+          <p:nvPr/>
+        </p:nvSpPr>
+        <p:spPr>
+          <a:xfrm>
+            <a:off x="640080" y="5669280"/>
+            <a:ext cx="10908792" cy="457200"/>
+          </a:xfrm>
+          <a:prstGeom prst="rect">
+            <a:avLst/>
+          </a:prstGeom>
+          <a:noFill/>
+          <a:ln/>
+        </p:spPr>
+        <p:txBody>
+          <a:bodyPr wrap="square" lIns="0" tIns="0" rIns="0" bIns="0" rtlCol="0" anchor="ctr"/>
+          <a:lstStyle/>
+          <a:p>
+            <a:pPr algn="l" indent="0" marL="0">
+              <a:buNone/>
+            </a:pPr>
+            <a:r>
+              <a:rPr lang="en-US" sz="1400" dirty="0" b="1">
+                <a:solidFill>
+                  <a:schemeClr val="tx2"/>
+                </a:solidFill>
+              </a:rPr>
+              <a:t>검색 가설의 결과: ① 질문 바꿔 쓰기는 구어체만 개선되고 순위는 흩어졌다  ② Reranker는 Hit@1 0.69 → 0.87</a:t>
+            </a:r>
+            <a:endParaRPr lang="en-US" sz="1400" dirty="0"/>
+          </a:p>
+        </p:txBody>
+      </p:sp>
+    </p:spTree>
+  </p:cSld>
+  <p:clrMapOvr>
+    <a:masterClrMapping/>
+  </p:clrMapOvr>
+</p:sld>
+</file>
+
+<file path=ppt/slides/slide15.xml><?xml version="1.0" encoding="utf-8"?>
+<p:sld xmlns:a="http://schemas.openxmlformats.org/drawingml/2006/main" xmlns:p="http://schemas.openxmlformats.org/presentationml/2006/main" xmlns:r="http://schemas.openxmlformats.org/officeDocument/2006/relationships">
+  <p:cSld>
+    <p:spTree>
+      <p:nvGrpSpPr>
+        <p:cNvPr id="1" name=""/>
+        <p:cNvGrpSpPr/>
+        <p:nvPr/>
+      </p:nvGrpSpPr>
+      <p:grpSpPr/>
+      <p:sp>
+        <p:nvSpPr>
+          <p:cNvPr id="2" name="Text 0"/>
+          <p:cNvSpPr/>
+          <p:nvPr>
+            <p:ph idx="100" type="title" hasCustomPrompt="1"/>
+          </p:nvPr>
+        </p:nvSpPr>
+        <p:spPr>
+          <a:xfrm>
+            <a:off x="640080" y="411480"/>
+            <a:ext cx="10908792" cy="822960"/>
+          </a:xfrm>
+          <a:prstGeom prst="rect">
+            <a:avLst/>
+          </a:prstGeom>
+          <a:noFill/>
+          <a:ln/>
+        </p:spPr>
+        <p:txBody>
+          <a:bodyPr wrap="square" lIns="0" tIns="0" rIns="0" bIns="0" rtlCol="0" anchor="ctr"/>
+          <a:lstStyle/>
+          <a:p>
+            <a:pPr algn="l" indent="0" marL="0">
+              <a:buNone/>
+            </a:pPr>
+            <a:r>
+              <a:rPr lang="en-US" sz="2800" b="1" dirty="0">
+                <a:solidFill>
+                  <a:schemeClr val="tx2"/>
+                </a:solidFill>
+              </a:rPr>
+              <a:t>골든셋: 직접 설계한 평가 기반 64문항</a:t>
+            </a:r>
+            <a:endParaRPr lang="en-US" sz="2800" dirty="0"/>
+          </a:p>
+        </p:txBody>
+      </p:sp>
+      <p:sp>
+        <p:nvSpPr>
+          <p:cNvPr id="3" name="Slide Number Placeholder 0"/>
+          <p:cNvSpPr>
+            <a:spLocks noGrp="1"/>
+          </p:cNvSpPr>
+          <p:nvPr>
+            <p:ph type="sldNum" sz="quarter" idx="4294967295"/>
+          </p:nvPr>
+        </p:nvSpPr>
+        <p:spPr>
+          <a:xfrm>
+            <a:off x="11274552" y="6400800"/>
+            <a:ext cx="457200" cy="274320"/>
+          </a:xfrm>
+          <a:prstGeom prst="rect">
+            <a:avLst/>
+          </a:prstGeom>
+          <a:extLst>
+            <a:ext uri="{C572A759-6A51-4108-AA02-DFA0A04FC94B}">
+              <ma14:wrappingTextBoxFlag xmlns:ma14="http://schemas.microsoft.com/office/mac/drawingml/2011/main" val="0"/>
+            </a:ext>
+          </a:extLst>
+        </p:spPr>
+        <p:txBody>
+          <a:bodyPr/>
+          <a:lstStyle>
+            <a:lvl1pPr>
+              <a:defRPr sz="1000">
+                <a:solidFill>
+                  <a:schemeClr val="accent4"/>
+                </a:solidFill>
+              </a:defRPr>
+            </a:lvl1pPr>
+          </a:lstStyle>
+          <a:p>
+            <a:pPr algn="r"/>
+            <a:fld id="{F7021451-1387-4CA6-816F-3879F97B5CBC}" type="slidenum">
+              <a:rPr b="0" lang="en-US"/>
+              <a:t>9</a:t>
+            </a:fld>
+            <a:endParaRPr lang="en-US"/>
+          </a:p>
+        </p:txBody>
+      </p:sp>
+      <p:sp>
+        <p:nvSpPr>
+          <p:cNvPr id="4" name="Gold card 1"/>
+          <p:cNvSpPr/>
+          <p:nvPr/>
+        </p:nvSpPr>
+        <p:spPr>
+          <a:xfrm>
+            <a:off x="640080" y="1463040"/>
+            <a:ext cx="3514344" cy="2194560"/>
+          </a:xfrm>
+          <a:prstGeom prst="roundRect">
+            <a:avLst>
+              <a:gd name="adj" fmla="val 3243"/>
+            </a:avLst>
+          </a:prstGeom>
+          <a:solidFill>
+            <a:schemeClr val="bg2"/>
+          </a:solidFill>
+          <a:ln w="12700">
+            <a:solidFill>
+              <a:schemeClr val="bg2"/>
+            </a:solidFill>
+            <a:prstDash val="solid"/>
+          </a:ln>
+        </p:spPr>
+      </p:sp>
+      <p:sp>
+        <p:nvSpPr>
+          <p:cNvPr id="5" name="Gold title 1"/>
+          <p:cNvSpPr txBox="1"/>
+          <p:nvPr/>
+        </p:nvSpPr>
+        <p:spPr>
+          <a:xfrm>
+            <a:off x="868680" y="1600200"/>
+            <a:ext cx="3057144" cy="411480"/>
+          </a:xfrm>
+          <a:prstGeom prst="rect">
+            <a:avLst/>
+          </a:prstGeom>
+          <a:noFill/>
+          <a:ln/>
+        </p:spPr>
+        <p:txBody>
+          <a:bodyPr wrap="square" lIns="0" tIns="0" rIns="0" bIns="0" rtlCol="0" anchor="t"/>
+          <a:lstStyle/>
+          <a:p>
+            <a:pPr algn="l" indent="0" marL="0">
+              <a:buNone/>
+            </a:pPr>
+            <a:r>
+              <a:rPr lang="en-US" sz="1600" dirty="0" b="1">
+                <a:solidFill>
+                  <a:schemeClr val="accent1"/>
+                </a:solidFill>
+              </a:rPr>
+              <a:t>8개 유형으로 분류</a:t>
+            </a:r>
+            <a:endParaRPr lang="en-US" sz="1600" dirty="0"/>
+          </a:p>
+        </p:txBody>
+      </p:sp>
+      <p:sp>
+        <p:nvSpPr>
+          <p:cNvPr id="6" name="Gold body 1"/>
+          <p:cNvSpPr txBox="1"/>
+          <p:nvPr/>
+        </p:nvSpPr>
+        <p:spPr>
+          <a:xfrm>
+            <a:off x="868680" y="2057400"/>
+            <a:ext cx="3057144" cy="960120"/>
+          </a:xfrm>
+          <a:prstGeom prst="rect">
+            <a:avLst/>
+          </a:prstGeom>
+          <a:noFill/>
+          <a:ln/>
+        </p:spPr>
+        <p:txBody>
+          <a:bodyPr wrap="square" lIns="0" tIns="0" rIns="0" bIns="0" rtlCol="0" anchor="t"/>
+          <a:lstStyle/>
+          <a:p>
+            <a:pPr algn="l" indent="0" marL="0">
+              <a:buNone/>
+            </a:pPr>
+            <a:r>
+              <a:rPr lang="en-US" sz="1400" dirty="0">
+                <a:solidFill>
+                  <a:schemeClr val="tx1"/>
+                </a:solidFill>
+              </a:rPr>
+              <a:t>정의·조문번호·구어체 등 7유형 + 법에 없음 10문항</a:t>
+            </a:r>
+            <a:endParaRPr lang="en-US" sz="1400" dirty="0"/>
+          </a:p>
+        </p:txBody>
+      </p:sp>
+      <p:sp>
+        <p:nvSpPr>
+          <p:cNvPr id="7" name="Gold found 1"/>
+          <p:cNvSpPr txBox="1"/>
+          <p:nvPr/>
+        </p:nvSpPr>
+        <p:spPr>
+          <a:xfrm>
+            <a:off x="868680" y="3063240"/>
+            <a:ext cx="3057144" cy="457200"/>
+          </a:xfrm>
+          <a:prstGeom prst="rect">
+            <a:avLst/>
+          </a:prstGeom>
+          <a:noFill/>
+          <a:ln/>
+        </p:spPr>
+        <p:txBody>
+          <a:bodyPr wrap="square" lIns="0" tIns="0" rIns="0" bIns="0" rtlCol="0" anchor="t"/>
+          <a:lstStyle/>
+          <a:p>
+            <a:pPr algn="l" indent="0" marL="0">
+              <a:buNone/>
+            </a:pPr>
+            <a:r>
+              <a:rPr lang="en-US" sz="1400" dirty="0" b="1">
+                <a:solidFill>
+                  <a:schemeClr val="tx2"/>
+                </a:solidFill>
+              </a:rPr>
+              <a:t>→ 구어체 1.00, 주제형 0.50 같은 약점이 보임</a:t>
+            </a:r>
+            <a:endParaRPr lang="en-US" sz="1400" dirty="0"/>
+          </a:p>
+        </p:txBody>
+      </p:sp>
+      <p:sp>
+        <p:nvSpPr>
+          <p:cNvPr id="8" name="Gold card 2"/>
+          <p:cNvSpPr/>
+          <p:nvPr/>
+        </p:nvSpPr>
+        <p:spPr>
+          <a:xfrm>
+            <a:off x="4337304" y="1463040"/>
+            <a:ext cx="3514344" cy="2194560"/>
+          </a:xfrm>
+          <a:prstGeom prst="roundRect">
+            <a:avLst>
+              <a:gd name="adj" fmla="val 3243"/>
+            </a:avLst>
+          </a:prstGeom>
+          <a:solidFill>
+            <a:schemeClr val="bg2"/>
+          </a:solidFill>
+          <a:ln w="12700">
+            <a:solidFill>
+              <a:schemeClr val="bg2"/>
+            </a:solidFill>
+            <a:prstDash val="solid"/>
+          </a:ln>
+        </p:spPr>
+      </p:sp>
+      <p:sp>
+        <p:nvSpPr>
+          <p:cNvPr id="9" name="Gold title 2"/>
+          <p:cNvSpPr txBox="1"/>
+          <p:nvPr/>
+        </p:nvSpPr>
+        <p:spPr>
+          <a:xfrm>
+            <a:off x="4565904" y="1600200"/>
+            <a:ext cx="3057144" cy="411480"/>
+          </a:xfrm>
+          <a:prstGeom prst="rect">
+            <a:avLst/>
+          </a:prstGeom>
+          <a:noFill/>
+          <a:ln/>
+        </p:spPr>
+        <p:txBody>
+          <a:bodyPr wrap="square" lIns="0" tIns="0" rIns="0" bIns="0" rtlCol="0" anchor="t"/>
+          <a:lstStyle/>
+          <a:p>
+            <a:pPr algn="l" indent="0" marL="0">
+              <a:buNone/>
+            </a:pPr>
+            <a:r>
+              <a:rPr lang="en-US" sz="1600" dirty="0" b="1">
+                <a:solidFill>
+                  <a:schemeClr val="accent1"/>
+                </a:solidFill>
+              </a:rPr>
+              <a:t>조문·청크 두 단위</a:t>
+            </a:r>
+            <a:endParaRPr lang="en-US" sz="1600" dirty="0"/>
+          </a:p>
+        </p:txBody>
+      </p:sp>
+      <p:sp>
+        <p:nvSpPr>
+          <p:cNvPr id="10" name="Gold body 2"/>
+          <p:cNvSpPr txBox="1"/>
+          <p:nvPr/>
+        </p:nvSpPr>
+        <p:spPr>
+          <a:xfrm>
+            <a:off x="4565904" y="2057400"/>
+            <a:ext cx="3057144" cy="960120"/>
+          </a:xfrm>
+          <a:prstGeom prst="rect">
+            <a:avLst/>
+          </a:prstGeom>
+          <a:noFill/>
+          <a:ln/>
+        </p:spPr>
+        <p:txBody>
+          <a:bodyPr wrap="square" lIns="0" tIns="0" rIns="0" bIns="0" rtlCol="0" anchor="t"/>
+          <a:lstStyle/>
+          <a:p>
+            <a:pPr algn="l" indent="0" marL="0">
+              <a:buNone/>
+            </a:pPr>
+            <a:r>
+              <a:rPr lang="en-US" sz="1400" dirty="0">
+                <a:solidFill>
+                  <a:schemeClr val="tx1"/>
+                </a:solidFill>
+              </a:rPr>
+              <a:t>정답을 조문(gold_articles)과 청크(gold_chunks)로 둠</a:t>
+            </a:r>
+            <a:endParaRPr lang="en-US" sz="1400" dirty="0"/>
+          </a:p>
+        </p:txBody>
+      </p:sp>
+      <p:sp>
+        <p:nvSpPr>
+          <p:cNvPr id="11" name="Gold found 2"/>
+          <p:cNvSpPr txBox="1"/>
+          <p:nvPr/>
+        </p:nvSpPr>
+        <p:spPr>
+          <a:xfrm>
+            <a:off x="4565904" y="3063240"/>
+            <a:ext cx="3057144" cy="457200"/>
+          </a:xfrm>
+          <a:prstGeom prst="rect">
+            <a:avLst/>
+          </a:prstGeom>
+          <a:noFill/>
+          <a:ln/>
+        </p:spPr>
+        <p:txBody>
+          <a:bodyPr wrap="square" lIns="0" tIns="0" rIns="0" bIns="0" rtlCol="0" anchor="t"/>
+          <a:lstStyle/>
+          <a:p>
+            <a:pPr algn="l" indent="0" marL="0">
+              <a:buNone/>
+            </a:pPr>
+            <a:r>
+              <a:rPr lang="en-US" sz="1400" dirty="0" b="1">
+                <a:solidFill>
+                  <a:schemeClr val="tx2"/>
+                </a:solidFill>
+              </a:rPr>
+              <a:t>→ q01 실패를 잡음</a:t>
+            </a:r>
+            <a:endParaRPr lang="en-US" sz="1400" dirty="0"/>
+          </a:p>
+        </p:txBody>
+      </p:sp>
+      <p:sp>
+        <p:nvSpPr>
+          <p:cNvPr id="12" name="Gold card 3"/>
+          <p:cNvSpPr/>
+          <p:nvPr/>
+        </p:nvSpPr>
+        <p:spPr>
+          <a:xfrm>
+            <a:off x="8034528" y="1463040"/>
+            <a:ext cx="3514344" cy="2194560"/>
+          </a:xfrm>
+          <a:prstGeom prst="roundRect">
+            <a:avLst>
+              <a:gd name="adj" fmla="val 3243"/>
+            </a:avLst>
+          </a:prstGeom>
+          <a:solidFill>
+            <a:schemeClr val="bg2"/>
+          </a:solidFill>
+          <a:ln w="12700">
+            <a:solidFill>
+              <a:schemeClr val="bg2"/>
+            </a:solidFill>
+            <a:prstDash val="solid"/>
+          </a:ln>
+        </p:spPr>
+      </p:sp>
+      <p:sp>
+        <p:nvSpPr>
+          <p:cNvPr id="13" name="Gold title 3"/>
+          <p:cNvSpPr txBox="1"/>
+          <p:nvPr/>
+        </p:nvSpPr>
+        <p:spPr>
+          <a:xfrm>
+            <a:off x="8263128" y="1600200"/>
+            <a:ext cx="3057144" cy="411480"/>
+          </a:xfrm>
+          <a:prstGeom prst="rect">
+            <a:avLst/>
+          </a:prstGeom>
+          <a:noFill/>
+          <a:ln/>
+        </p:spPr>
+        <p:txBody>
+          <a:bodyPr wrap="square" lIns="0" tIns="0" rIns="0" bIns="0" rtlCol="0" anchor="t"/>
+          <a:lstStyle/>
+          <a:p>
+            <a:pPr algn="l" indent="0" marL="0">
+              <a:buNone/>
+            </a:pPr>
+            <a:r>
+              <a:rPr lang="en-US" sz="1600" dirty="0" b="1">
+                <a:solidFill>
+                  <a:schemeClr val="accent1"/>
+                </a:solidFill>
+              </a:rPr>
+              <a:t>Hit와 Recall 분리</a:t>
+            </a:r>
+            <a:endParaRPr lang="en-US" sz="1600" dirty="0"/>
+          </a:p>
+        </p:txBody>
+      </p:sp>
+      <p:sp>
+        <p:nvSpPr>
+          <p:cNvPr id="14" name="Gold body 3"/>
+          <p:cNvSpPr txBox="1"/>
+          <p:nvPr/>
+        </p:nvSpPr>
+        <p:spPr>
+          <a:xfrm>
+            <a:off x="8263128" y="2057400"/>
+            <a:ext cx="3057144" cy="960120"/>
+          </a:xfrm>
+          <a:prstGeom prst="rect">
+            <a:avLst/>
+          </a:prstGeom>
+          <a:noFill/>
+          <a:ln/>
+        </p:spPr>
+        <p:txBody>
+          <a:bodyPr wrap="square" lIns="0" tIns="0" rIns="0" bIns="0" rtlCol="0" anchor="t"/>
+          <a:lstStyle/>
+          <a:p>
+            <a:pPr algn="l" indent="0" marL="0">
+              <a:buNone/>
+            </a:pPr>
+            <a:r>
+              <a:rPr lang="en-US" sz="1400" dirty="0">
+                <a:solidFill>
+                  <a:schemeClr val="tx1"/>
+                </a:solidFill>
+              </a:rPr>
+              <a:t>정답이 여럿이면 하나라도(Hit)와 찾은 비율(Recall)을 따로 셈</a:t>
+            </a:r>
+            <a:endParaRPr lang="en-US" sz="1400" dirty="0"/>
+          </a:p>
+        </p:txBody>
+      </p:sp>
+      <p:sp>
+        <p:nvSpPr>
+          <p:cNvPr id="15" name="Gold found 3"/>
+          <p:cNvSpPr txBox="1"/>
+          <p:nvPr/>
+        </p:nvSpPr>
+        <p:spPr>
+          <a:xfrm>
+            <a:off x="8263128" y="3063240"/>
+            <a:ext cx="3057144" cy="457200"/>
+          </a:xfrm>
+          <a:prstGeom prst="rect">
+            <a:avLst/>
+          </a:prstGeom>
+          <a:noFill/>
+          <a:ln/>
+        </p:spPr>
+        <p:txBody>
+          <a:bodyPr wrap="square" lIns="0" tIns="0" rIns="0" bIns="0" rtlCol="0" anchor="t"/>
+          <a:lstStyle/>
+          <a:p>
+            <a:pPr algn="l" indent="0" marL="0">
+              <a:buNone/>
+            </a:pPr>
+            <a:r>
+              <a:rPr lang="en-US" sz="1400" dirty="0" b="1">
+                <a:solidFill>
+                  <a:schemeClr val="tx2"/>
+                </a:solidFill>
+              </a:rPr>
+              <a:t>→ q31~q33의 제43조 누락이 드러남</a:t>
+            </a:r>
+            <a:endParaRPr lang="en-US" sz="1400" dirty="0"/>
+          </a:p>
+        </p:txBody>
+      </p:sp>
+      <p:sp>
+        <p:nvSpPr>
+          <p:cNvPr id="16" name="Gold card 4"/>
+          <p:cNvSpPr/>
+          <p:nvPr/>
+        </p:nvSpPr>
+        <p:spPr>
+          <a:xfrm>
+            <a:off x="640080" y="3840480"/>
+            <a:ext cx="3514344" cy="2194560"/>
+          </a:xfrm>
+          <a:prstGeom prst="roundRect">
+            <a:avLst>
+              <a:gd name="adj" fmla="val 3243"/>
+            </a:avLst>
+          </a:prstGeom>
+          <a:solidFill>
+            <a:schemeClr val="bg2"/>
+          </a:solidFill>
+          <a:ln w="12700">
+            <a:solidFill>
+              <a:schemeClr val="bg2"/>
+            </a:solidFill>
+            <a:prstDash val="solid"/>
+          </a:ln>
+        </p:spPr>
+      </p:sp>
+      <p:sp>
+        <p:nvSpPr>
+          <p:cNvPr id="17" name="Gold title 4"/>
+          <p:cNvSpPr txBox="1"/>
+          <p:nvPr/>
+        </p:nvSpPr>
+        <p:spPr>
+          <a:xfrm>
+            <a:off x="868680" y="3977640"/>
+            <a:ext cx="3057144" cy="411480"/>
+          </a:xfrm>
+          <a:prstGeom prst="rect">
+            <a:avLst/>
+          </a:prstGeom>
+          <a:noFill/>
+          <a:ln/>
+        </p:spPr>
+        <p:txBody>
+          <a:bodyPr wrap="square" lIns="0" tIns="0" rIns="0" bIns="0" rtlCol="0" anchor="t"/>
+          <a:lstStyle/>
+          <a:p>
+            <a:pPr algn="l" indent="0" marL="0">
+              <a:buNone/>
+            </a:pPr>
+            <a:r>
+              <a:rPr lang="en-US" sz="1600" dirty="0" b="1">
+                <a:solidFill>
+                  <a:schemeClr val="accent1"/>
+                </a:solidFill>
+              </a:rPr>
+              <a:t>근접 오답 4개</a:t>
+            </a:r>
+            <a:endParaRPr lang="en-US" sz="1600" dirty="0"/>
+          </a:p>
+        </p:txBody>
+      </p:sp>
+      <p:sp>
+        <p:nvSpPr>
+          <p:cNvPr id="18" name="Gold body 4"/>
+          <p:cNvSpPr txBox="1"/>
+          <p:nvPr/>
+        </p:nvSpPr>
+        <p:spPr>
+          <a:xfrm>
+            <a:off x="868680" y="4434840"/>
+            <a:ext cx="3057144" cy="960120"/>
+          </a:xfrm>
+          <a:prstGeom prst="rect">
+            <a:avLst/>
+          </a:prstGeom>
+          <a:noFill/>
+          <a:ln/>
+        </p:spPr>
+        <p:txBody>
+          <a:bodyPr wrap="square" lIns="0" tIns="0" rIns="0" bIns="0" rtlCol="0" anchor="t"/>
+          <a:lstStyle/>
+          <a:p>
+            <a:pPr algn="l" indent="0" marL="0">
+              <a:buNone/>
+            </a:pPr>
+            <a:r>
+              <a:rPr lang="en-US" sz="1400" dirty="0">
+                <a:solidFill>
+                  <a:schemeClr val="tx1"/>
+                </a:solidFill>
+              </a:rPr>
+              <a:t>"법에 없음" 중 4개는 관련 단어는 있지만 답은 없는 질문</a:t>
+            </a:r>
+            <a:endParaRPr lang="en-US" sz="1400" dirty="0"/>
+          </a:p>
+        </p:txBody>
+      </p:sp>
+      <p:sp>
+        <p:nvSpPr>
+          <p:cNvPr id="19" name="Gold found 4"/>
+          <p:cNvSpPr txBox="1"/>
+          <p:nvPr/>
+        </p:nvSpPr>
+        <p:spPr>
+          <a:xfrm>
+            <a:off x="868680" y="5440680"/>
+            <a:ext cx="3057144" cy="457200"/>
+          </a:xfrm>
+          <a:prstGeom prst="rect">
+            <a:avLst/>
+          </a:prstGeom>
+          <a:noFill/>
+          <a:ln/>
+        </p:spPr>
+        <p:txBody>
+          <a:bodyPr wrap="square" lIns="0" tIns="0" rIns="0" bIns="0" rtlCol="0" anchor="t"/>
+          <a:lstStyle/>
+          <a:p>
+            <a:pPr algn="l" indent="0" marL="0">
+              <a:buNone/>
+            </a:pPr>
+            <a:r>
+              <a:rPr lang="en-US" sz="1400" dirty="0" b="1">
+                <a:solidFill>
+                  <a:schemeClr val="tx2"/>
+                </a:solidFill>
+              </a:rPr>
+              <a:t>→ 거절 10/10이 쉬운 문제의 결과가 아님</a:t>
+            </a:r>
+            <a:endParaRPr lang="en-US" sz="1400" dirty="0"/>
+          </a:p>
+        </p:txBody>
+      </p:sp>
+      <p:sp>
+        <p:nvSpPr>
+          <p:cNvPr id="20" name="Gold card 5"/>
+          <p:cNvSpPr/>
+          <p:nvPr/>
+        </p:nvSpPr>
+        <p:spPr>
+          <a:xfrm>
+            <a:off x="4337304" y="3840480"/>
+            <a:ext cx="3514344" cy="2194560"/>
+          </a:xfrm>
+          <a:prstGeom prst="roundRect">
+            <a:avLst>
+              <a:gd name="adj" fmla="val 3243"/>
+            </a:avLst>
+          </a:prstGeom>
+          <a:solidFill>
+            <a:schemeClr val="bg2"/>
+          </a:solidFill>
+          <a:ln w="12700">
+            <a:solidFill>
+              <a:schemeClr val="bg2"/>
+            </a:solidFill>
+            <a:prstDash val="solid"/>
+          </a:ln>
+        </p:spPr>
+      </p:sp>
+      <p:sp>
+        <p:nvSpPr>
+          <p:cNvPr id="21" name="Gold title 5"/>
+          <p:cNvSpPr txBox="1"/>
+          <p:nvPr/>
+        </p:nvSpPr>
+        <p:spPr>
+          <a:xfrm>
+            <a:off x="4565904" y="3977640"/>
+            <a:ext cx="3057144" cy="411480"/>
+          </a:xfrm>
+          <a:prstGeom prst="rect">
+            <a:avLst/>
+          </a:prstGeom>
+          <a:noFill/>
+          <a:ln/>
+        </p:spPr>
+        <p:txBody>
+          <a:bodyPr wrap="square" lIns="0" tIns="0" rIns="0" bIns="0" rtlCol="0" anchor="t"/>
+          <a:lstStyle/>
+          <a:p>
+            <a:pPr algn="l" indent="0" marL="0">
+              <a:buNone/>
+            </a:pPr>
+            <a:r>
+              <a:rPr lang="en-US" sz="1600" dirty="0" b="1">
+                <a:solidFill>
+                  <a:schemeClr val="accent1"/>
+                </a:solidFill>
+              </a:rPr>
+              <a:t>근거 문구 + 자동 검사</a:t>
+            </a:r>
+            <a:endParaRPr lang="en-US" sz="1600" dirty="0"/>
+          </a:p>
+        </p:txBody>
+      </p:sp>
+      <p:sp>
+        <p:nvSpPr>
+          <p:cNvPr id="22" name="Gold body 5"/>
+          <p:cNvSpPr txBox="1"/>
+          <p:nvPr/>
+        </p:nvSpPr>
+        <p:spPr>
+          <a:xfrm>
+            <a:off x="4565904" y="4434840"/>
+            <a:ext cx="3057144" cy="960120"/>
+          </a:xfrm>
+          <a:prstGeom prst="rect">
+            <a:avLst/>
+          </a:prstGeom>
+          <a:noFill/>
+          <a:ln/>
+        </p:spPr>
+        <p:txBody>
+          <a:bodyPr wrap="square" lIns="0" tIns="0" rIns="0" bIns="0" rtlCol="0" anchor="t"/>
+          <a:lstStyle/>
+          <a:p>
+            <a:pPr algn="l" indent="0" marL="0">
+              <a:buNone/>
+            </a:pPr>
+            <a:r>
+              <a:rPr lang="en-US" sz="1400" dirty="0">
+                <a:solidFill>
+                  <a:schemeClr val="tx1"/>
+                </a:solidFill>
+              </a:rPr>
+              <a:t>정답마다 근거 문구를 달고 해당 조문에 있는지 검사</a:t>
+            </a:r>
+            <a:endParaRPr lang="en-US" sz="1400" dirty="0"/>
+          </a:p>
+        </p:txBody>
+      </p:sp>
+      <p:sp>
+        <p:nvSpPr>
+          <p:cNvPr id="23" name="Gold found 5"/>
+          <p:cNvSpPr txBox="1"/>
+          <p:nvPr/>
+        </p:nvSpPr>
+        <p:spPr>
+          <a:xfrm>
+            <a:off x="4565904" y="5440680"/>
+            <a:ext cx="3057144" cy="457200"/>
+          </a:xfrm>
+          <a:prstGeom prst="rect">
+            <a:avLst/>
+          </a:prstGeom>
+          <a:noFill/>
+          <a:ln/>
+        </p:spPr>
+        <p:txBody>
+          <a:bodyPr wrap="square" lIns="0" tIns="0" rIns="0" bIns="0" rtlCol="0" anchor="t"/>
+          <a:lstStyle/>
+          <a:p>
+            <a:pPr algn="l" indent="0" marL="0">
+              <a:buNone/>
+            </a:pPr>
+            <a:r>
+              <a:rPr lang="en-US" sz="1400" dirty="0" b="1">
+                <a:solidFill>
+                  <a:schemeClr val="tx2"/>
+                </a:solidFill>
+              </a:rPr>
+              <a:t>→ 라벨 자체의 오류를 줄임</a:t>
+            </a:r>
+            <a:endParaRPr lang="en-US" sz="1400" dirty="0"/>
+          </a:p>
+        </p:txBody>
+      </p:sp>
+      <p:sp>
+        <p:nvSpPr>
+          <p:cNvPr id="24" name="Gold card 6"/>
+          <p:cNvSpPr/>
+          <p:nvPr/>
+        </p:nvSpPr>
+        <p:spPr>
+          <a:xfrm>
+            <a:off x="8034528" y="3840480"/>
+            <a:ext cx="3514344" cy="2194560"/>
+          </a:xfrm>
+          <a:prstGeom prst="roundRect">
+            <a:avLst>
+              <a:gd name="adj" fmla="val 3243"/>
+            </a:avLst>
+          </a:prstGeom>
+          <a:solidFill>
+            <a:schemeClr val="bg2"/>
+          </a:solidFill>
+          <a:ln w="12700">
+            <a:solidFill>
+              <a:schemeClr val="bg2"/>
+            </a:solidFill>
+            <a:prstDash val="solid"/>
+          </a:ln>
+        </p:spPr>
+      </p:sp>
+      <p:sp>
+        <p:nvSpPr>
+          <p:cNvPr id="25" name="Gold title 6"/>
+          <p:cNvSpPr txBox="1"/>
+          <p:nvPr/>
+        </p:nvSpPr>
+        <p:spPr>
+          <a:xfrm>
+            <a:off x="8263128" y="3977640"/>
+            <a:ext cx="3057144" cy="411480"/>
+          </a:xfrm>
+          <a:prstGeom prst="rect">
+            <a:avLst/>
+          </a:prstGeom>
+          <a:noFill/>
+          <a:ln/>
+        </p:spPr>
+        <p:txBody>
+          <a:bodyPr wrap="square" lIns="0" tIns="0" rIns="0" bIns="0" rtlCol="0" anchor="t"/>
+          <a:lstStyle/>
+          <a:p>
+            <a:pPr algn="l" indent="0" marL="0">
+              <a:buNone/>
+            </a:pPr>
+            <a:r>
+              <a:rPr lang="en-US" sz="1600" dirty="0" b="1">
+                <a:solidFill>
+                  <a:schemeClr val="accent1"/>
+                </a:solidFill>
+              </a:rPr>
+              <a:t>v1 동결</a:t>
+            </a:r>
+            <a:endParaRPr lang="en-US" sz="1600" dirty="0"/>
+          </a:p>
+        </p:txBody>
+      </p:sp>
+      <p:sp>
+        <p:nvSpPr>
+          <p:cNvPr id="26" name="Gold body 6"/>
+          <p:cNvSpPr txBox="1"/>
+          <p:nvPr/>
+        </p:nvSpPr>
+        <p:spPr>
+          <a:xfrm>
+            <a:off x="8263128" y="4434840"/>
+            <a:ext cx="3057144" cy="960120"/>
+          </a:xfrm>
+          <a:prstGeom prst="rect">
+            <a:avLst/>
+          </a:prstGeom>
+          <a:noFill/>
+          <a:ln/>
+        </p:spPr>
+        <p:txBody>
+          <a:bodyPr wrap="square" lIns="0" tIns="0" rIns="0" bIns="0" rtlCol="0" anchor="t"/>
+          <a:lstStyle/>
+          <a:p>
+            <a:pPr algn="l" indent="0" marL="0">
+              <a:buNone/>
+            </a:pPr>
+            <a:r>
+              <a:rPr lang="en-US" sz="1400" dirty="0">
+                <a:solidFill>
+                  <a:schemeClr val="tx1"/>
+                </a:solidFill>
+              </a:rPr>
+              <a:t>확정 후 점수를 보고 정답을 고치지 않음</a:t>
+            </a:r>
+            <a:endParaRPr lang="en-US" sz="1400" dirty="0"/>
+          </a:p>
+        </p:txBody>
+      </p:sp>
+      <p:sp>
+        <p:nvSpPr>
+          <p:cNvPr id="27" name="Gold found 6"/>
+          <p:cNvSpPr txBox="1"/>
+          <p:nvPr/>
+        </p:nvSpPr>
+        <p:spPr>
+          <a:xfrm>
+            <a:off x="8263128" y="5440680"/>
+            <a:ext cx="3057144" cy="457200"/>
+          </a:xfrm>
+          <a:prstGeom prst="rect">
+            <a:avLst/>
+          </a:prstGeom>
+          <a:noFill/>
+          <a:ln/>
+        </p:spPr>
+        <p:txBody>
+          <a:bodyPr wrap="square" lIns="0" tIns="0" rIns="0" bIns="0" rtlCol="0" anchor="t"/>
+          <a:lstStyle/>
+          <a:p>
+            <a:pPr algn="l" indent="0" marL="0">
+              <a:buNone/>
+            </a:pPr>
+            <a:r>
+              <a:rPr lang="en-US" sz="1400" dirty="0" b="1">
+                <a:solidFill>
+                  <a:schemeClr val="tx2"/>
+                </a:solidFill>
+              </a:rPr>
+              <a:t>→ 개선폭을 믿을 수 있는 최소 조건</a:t>
+            </a:r>
+            <a:endParaRPr lang="en-US" sz="1400" dirty="0"/>
+          </a:p>
+        </p:txBody>
+      </p:sp>
+      <p:sp>
+        <p:nvSpPr>
+          <p:cNvPr id="28" name="Gold caveat"/>
+          <p:cNvSpPr txBox="1"/>
+          <p:nvPr/>
+        </p:nvSpPr>
+        <p:spPr>
+          <a:xfrm>
+            <a:off x="640080" y="6080760"/>
+            <a:ext cx="9144000" cy="274320"/>
+          </a:xfrm>
+          <a:prstGeom prst="rect">
+            <a:avLst/>
+          </a:prstGeom>
+          <a:noFill/>
+          <a:ln/>
+        </p:spPr>
+        <p:txBody>
+          <a:bodyPr wrap="square" lIns="0" tIns="0" rIns="0" bIns="0" rtlCol="0" anchor="t"/>
+          <a:lstStyle/>
+          <a:p>
+            <a:pPr algn="l" indent="0" marL="0">
+              <a:buNone/>
+            </a:pPr>
+            <a:r>
+              <a:rPr lang="en-US" sz="1200" dirty="0">
+                <a:solidFill>
+                  <a:schemeClr val="accent4"/>
+                </a:solidFill>
+              </a:rPr>
+              <a:t>한계: 사람 검토는 아직 전부 끝나지 않았다 (한계와 다음 단계 슬라이드 참고)</a:t>
+            </a:r>
+            <a:endParaRPr lang="en-US" sz="1200" dirty="0"/>
+          </a:p>
+        </p:txBody>
+      </p:sp>
+    </p:spTree>
+  </p:cSld>
+  <p:clrMapOvr>
+    <a:masterClrMapping/>
+  </p:clrMapOvr>
+</p:sld>
+</file>
+
 <file path=ppt/slides/slide2.xml><?xml version="1.0" encoding="utf-8"?>
 <p:sld xmlns:a="http://schemas.openxmlformats.org/drawingml/2006/main" xmlns:r="http://schemas.openxmlformats.org/officeDocument/2006/relationships" xmlns:p="http://schemas.openxmlformats.org/presentationml/2006/main">
   <p:cSld name="Slide 2">
@@ -10308,7 +12109,7 @@
                   <a:schemeClr val="tx1"/>
                 </a:solidFill>
               </a:rPr>
-              <a:t>한국어는 조사 때문에 형태소 분석이 필요해 구현 부담이 컸다. 대신 Multi Query와 Reranker를 비교했다.</a:t>
+              <a:t>내가 Multi Query와 Reranker를 골랐다. 질문을 바꿔 쓰고 재정렬하면 개선이 클 것이라는 판단이었고, 한국어 BM25의 형태소 분석 부담도 컸다.</a:t>
             </a:r>
             <a:endParaRPr lang="en-US" sz="1400" dirty="0"/>
           </a:p>
